--- a/Welcome.pptx
+++ b/Welcome.pptx
@@ -3259,7 +3259,7 @@
           <a:p>
             <a:fld id="{234E0C2C-3BA3-4997-89D8-3BD7029691FF}" type="datetimeFigureOut">
               <a:rPr lang="it-IT" smtClean="0"/>
-              <a:t>02/02/25</a:t>
+              <a:t>11/03/26</a:t>
             </a:fld>
             <a:endParaRPr lang="it-IT"/>
           </a:p>
@@ -3457,7 +3457,7 @@
           <a:p>
             <a:fld id="{234E0C2C-3BA3-4997-89D8-3BD7029691FF}" type="datetimeFigureOut">
               <a:rPr lang="it-IT" smtClean="0"/>
-              <a:t>02/02/25</a:t>
+              <a:t>11/03/26</a:t>
             </a:fld>
             <a:endParaRPr lang="it-IT"/>
           </a:p>
@@ -3665,7 +3665,7 @@
           <a:p>
             <a:fld id="{234E0C2C-3BA3-4997-89D8-3BD7029691FF}" type="datetimeFigureOut">
               <a:rPr lang="it-IT" smtClean="0"/>
-              <a:t>02/02/25</a:t>
+              <a:t>11/03/26</a:t>
             </a:fld>
             <a:endParaRPr lang="it-IT"/>
           </a:p>
@@ -3863,7 +3863,7 @@
           <a:p>
             <a:fld id="{234E0C2C-3BA3-4997-89D8-3BD7029691FF}" type="datetimeFigureOut">
               <a:rPr lang="it-IT" smtClean="0"/>
-              <a:t>02/02/25</a:t>
+              <a:t>11/03/26</a:t>
             </a:fld>
             <a:endParaRPr lang="it-IT"/>
           </a:p>
@@ -4138,7 +4138,7 @@
           <a:p>
             <a:fld id="{234E0C2C-3BA3-4997-89D8-3BD7029691FF}" type="datetimeFigureOut">
               <a:rPr lang="it-IT" smtClean="0"/>
-              <a:t>02/02/25</a:t>
+              <a:t>11/03/26</a:t>
             </a:fld>
             <a:endParaRPr lang="it-IT"/>
           </a:p>
@@ -4403,7 +4403,7 @@
           <a:p>
             <a:fld id="{234E0C2C-3BA3-4997-89D8-3BD7029691FF}" type="datetimeFigureOut">
               <a:rPr lang="it-IT" smtClean="0"/>
-              <a:t>02/02/25</a:t>
+              <a:t>11/03/26</a:t>
             </a:fld>
             <a:endParaRPr lang="it-IT"/>
           </a:p>
@@ -4815,7 +4815,7 @@
           <a:p>
             <a:fld id="{234E0C2C-3BA3-4997-89D8-3BD7029691FF}" type="datetimeFigureOut">
               <a:rPr lang="it-IT" smtClean="0"/>
-              <a:t>02/02/25</a:t>
+              <a:t>11/03/26</a:t>
             </a:fld>
             <a:endParaRPr lang="it-IT"/>
           </a:p>
@@ -4956,7 +4956,7 @@
           <a:p>
             <a:fld id="{234E0C2C-3BA3-4997-89D8-3BD7029691FF}" type="datetimeFigureOut">
               <a:rPr lang="it-IT" smtClean="0"/>
-              <a:t>02/02/25</a:t>
+              <a:t>11/03/26</a:t>
             </a:fld>
             <a:endParaRPr lang="it-IT"/>
           </a:p>
@@ -5069,7 +5069,7 @@
           <a:p>
             <a:fld id="{234E0C2C-3BA3-4997-89D8-3BD7029691FF}" type="datetimeFigureOut">
               <a:rPr lang="it-IT" smtClean="0"/>
-              <a:t>02/02/25</a:t>
+              <a:t>11/03/26</a:t>
             </a:fld>
             <a:endParaRPr lang="it-IT"/>
           </a:p>
@@ -5380,7 +5380,7 @@
           <a:p>
             <a:fld id="{234E0C2C-3BA3-4997-89D8-3BD7029691FF}" type="datetimeFigureOut">
               <a:rPr lang="it-IT" smtClean="0"/>
-              <a:t>02/02/25</a:t>
+              <a:t>11/03/26</a:t>
             </a:fld>
             <a:endParaRPr lang="it-IT"/>
           </a:p>
@@ -5668,7 +5668,7 @@
           <a:p>
             <a:fld id="{234E0C2C-3BA3-4997-89D8-3BD7029691FF}" type="datetimeFigureOut">
               <a:rPr lang="it-IT" smtClean="0"/>
-              <a:t>02/02/25</a:t>
+              <a:t>11/03/26</a:t>
             </a:fld>
             <a:endParaRPr lang="it-IT"/>
           </a:p>
@@ -5909,7 +5909,7 @@
           <a:p>
             <a:fld id="{234E0C2C-3BA3-4997-89D8-3BD7029691FF}" type="datetimeFigureOut">
               <a:rPr lang="it-IT" smtClean="0"/>
-              <a:t>02/02/25</a:t>
+              <a:t>11/03/26</a:t>
             </a:fld>
             <a:endParaRPr lang="it-IT"/>
           </a:p>
@@ -8631,7 +8631,7 @@
           <a:p>
             <a:r>
               <a:rPr lang="it-IT" sz="1800" dirty="0"/>
-              <a:t>Please try to be on time 9:30 -17:30</a:t>
+              <a:t>Please try to be on time 14:00 -20:00</a:t>
             </a:r>
           </a:p>
           <a:p>
@@ -8671,12 +8671,6 @@
             <a:r>
               <a:rPr lang="en-US" sz="1800" dirty="0"/>
               <a:t>The course is for you, not for us, so ask question!</a:t>
-            </a:r>
-          </a:p>
-          <a:p>
-            <a:r>
-              <a:rPr lang="en-US" sz="1800" dirty="0"/>
-              <a:t>Beer/dinner on Thursday</a:t>
             </a:r>
           </a:p>
           <a:p>
@@ -9871,121 +9865,6 @@
                       </p:childTnLst>
                     </p:cTn>
                   </p:par>
-                  <p:par>
-                    <p:cTn id="52" fill="hold">
-                      <p:stCondLst>
-                        <p:cond delay="indefinite"/>
-                      </p:stCondLst>
-                      <p:childTnLst>
-                        <p:par>
-                          <p:cTn id="53" fill="hold">
-                            <p:stCondLst>
-                              <p:cond delay="0"/>
-                            </p:stCondLst>
-                            <p:childTnLst>
-                              <p:par>
-                                <p:cTn id="54" presetID="42" presetClass="entr" presetSubtype="0" fill="hold" nodeType="clickEffect">
-                                  <p:stCondLst>
-                                    <p:cond delay="0"/>
-                                  </p:stCondLst>
-                                  <p:childTnLst>
-                                    <p:set>
-                                      <p:cBhvr>
-                                        <p:cTn id="55" dur="1" fill="hold">
-                                          <p:stCondLst>
-                                            <p:cond delay="0"/>
-                                          </p:stCondLst>
-                                        </p:cTn>
-                                        <p:tgtEl>
-                                          <p:spTgt spid="3">
-                                            <p:txEl>
-                                              <p:pRg st="7" end="7"/>
-                                            </p:txEl>
-                                          </p:spTgt>
-                                        </p:tgtEl>
-                                        <p:attrNameLst>
-                                          <p:attrName>style.visibility</p:attrName>
-                                        </p:attrNameLst>
-                                      </p:cBhvr>
-                                      <p:to>
-                                        <p:strVal val="visible"/>
-                                      </p:to>
-                                    </p:set>
-                                    <p:animEffect transition="in" filter="fade">
-                                      <p:cBhvr>
-                                        <p:cTn id="56" dur="1000"/>
-                                        <p:tgtEl>
-                                          <p:spTgt spid="3">
-                                            <p:txEl>
-                                              <p:pRg st="7" end="7"/>
-                                            </p:txEl>
-                                          </p:spTgt>
-                                        </p:tgtEl>
-                                      </p:cBhvr>
-                                    </p:animEffect>
-                                    <p:anim calcmode="lin" valueType="num">
-                                      <p:cBhvr>
-                                        <p:cTn id="57" dur="1000" fill="hold"/>
-                                        <p:tgtEl>
-                                          <p:spTgt spid="3">
-                                            <p:txEl>
-                                              <p:pRg st="7" end="7"/>
-                                            </p:txEl>
-                                          </p:spTgt>
-                                        </p:tgtEl>
-                                        <p:attrNameLst>
-                                          <p:attrName>ppt_x</p:attrName>
-                                        </p:attrNameLst>
-                                      </p:cBhvr>
-                                      <p:tavLst>
-                                        <p:tav tm="0">
-                                          <p:val>
-                                            <p:strVal val="#ppt_x"/>
-                                          </p:val>
-                                        </p:tav>
-                                        <p:tav tm="100000">
-                                          <p:val>
-                                            <p:strVal val="#ppt_x"/>
-                                          </p:val>
-                                        </p:tav>
-                                      </p:tavLst>
-                                    </p:anim>
-                                    <p:anim calcmode="lin" valueType="num">
-                                      <p:cBhvr>
-                                        <p:cTn id="58" dur="1000" fill="hold"/>
-                                        <p:tgtEl>
-                                          <p:spTgt spid="3">
-                                            <p:txEl>
-                                              <p:pRg st="7" end="7"/>
-                                            </p:txEl>
-                                          </p:spTgt>
-                                        </p:tgtEl>
-                                        <p:attrNameLst>
-                                          <p:attrName>ppt_y</p:attrName>
-                                        </p:attrNameLst>
-                                      </p:cBhvr>
-                                      <p:tavLst>
-                                        <p:tav tm="0">
-                                          <p:val>
-                                            <p:strVal val="#ppt_y+.1"/>
-                                          </p:val>
-                                        </p:tav>
-                                        <p:tav tm="100000">
-                                          <p:val>
-                                            <p:strVal val="#ppt_y"/>
-                                          </p:val>
-                                        </p:tav>
-                                      </p:tavLst>
-                                    </p:anim>
-                                  </p:childTnLst>
-                                </p:cTn>
-                              </p:par>
-                            </p:childTnLst>
-                          </p:cTn>
-                        </p:par>
-                      </p:childTnLst>
-                    </p:cTn>
-                  </p:par>
                 </p:childTnLst>
               </p:cTn>
               <p:prevCondLst>
